--- a/Presentations/Final_Presentation.pptx
+++ b/Presentations/Final_Presentation.pptx
@@ -116,6 +116,11 @@
       </a:defRPr>
     </a:lvl9pPr>
   </p:defaultTextStyle>
+  <p:extLst>
+    <p:ext uri="{EFAFB233-063F-42B5-8137-9DF3F51BA10A}">
+      <p15:sldGuideLst xmlns:p15="http://schemas.microsoft.com/office/powerpoint/2012/main"/>
+    </p:ext>
+  </p:extLst>
 </p:presentation>
 </file>
 
@@ -2167,7 +2172,7 @@
           <a:p>
             <a:fld id="{75AB264B-F989-4B8D-9AB6-788FB99D65F9}" type="datetimeFigureOut">
               <a:rPr lang="en-IL" smtClean="0"/>
-              <a:t>07/08/2026</a:t>
+              <a:t>07/13/2026</a:t>
             </a:fld>
             <a:endParaRPr lang="en-IL"/>
           </a:p>
@@ -3364,7 +3369,7 @@
           <a:p>
             <a:fld id="{17B40696-48CB-43CB-8D0C-37FF29617483}" type="datetimeFigureOut">
               <a:rPr lang="en-US" smtClean="0"/>
-              <a:t>7/8/2026</a:t>
+              <a:t>7/13/2026</a:t>
             </a:fld>
             <a:endParaRPr lang="en-US"/>
           </a:p>
@@ -3564,7 +3569,7 @@
           <a:p>
             <a:fld id="{17B40696-48CB-43CB-8D0C-37FF29617483}" type="datetimeFigureOut">
               <a:rPr lang="en-US" smtClean="0"/>
-              <a:t>7/8/2026</a:t>
+              <a:t>7/13/2026</a:t>
             </a:fld>
             <a:endParaRPr lang="en-US"/>
           </a:p>
@@ -3774,7 +3779,7 @@
           <a:p>
             <a:fld id="{17B40696-48CB-43CB-8D0C-37FF29617483}" type="datetimeFigureOut">
               <a:rPr lang="en-US" smtClean="0"/>
-              <a:t>7/8/2026</a:t>
+              <a:t>7/13/2026</a:t>
             </a:fld>
             <a:endParaRPr lang="en-US"/>
           </a:p>
@@ -3974,7 +3979,7 @@
           <a:p>
             <a:fld id="{17B40696-48CB-43CB-8D0C-37FF29617483}" type="datetimeFigureOut">
               <a:rPr lang="en-US" smtClean="0"/>
-              <a:t>7/8/2026</a:t>
+              <a:t>7/13/2026</a:t>
             </a:fld>
             <a:endParaRPr lang="en-US"/>
           </a:p>
@@ -4250,7 +4255,7 @@
           <a:p>
             <a:fld id="{17B40696-48CB-43CB-8D0C-37FF29617483}" type="datetimeFigureOut">
               <a:rPr lang="en-US" smtClean="0"/>
-              <a:t>7/8/2026</a:t>
+              <a:t>7/13/2026</a:t>
             </a:fld>
             <a:endParaRPr lang="en-US"/>
           </a:p>
@@ -4518,7 +4523,7 @@
           <a:p>
             <a:fld id="{17B40696-48CB-43CB-8D0C-37FF29617483}" type="datetimeFigureOut">
               <a:rPr lang="en-US" smtClean="0"/>
-              <a:t>7/8/2026</a:t>
+              <a:t>7/13/2026</a:t>
             </a:fld>
             <a:endParaRPr lang="en-US"/>
           </a:p>
@@ -4933,7 +4938,7 @@
           <a:p>
             <a:fld id="{17B40696-48CB-43CB-8D0C-37FF29617483}" type="datetimeFigureOut">
               <a:rPr lang="en-US" smtClean="0"/>
-              <a:t>7/8/2026</a:t>
+              <a:t>7/13/2026</a:t>
             </a:fld>
             <a:endParaRPr lang="en-US"/>
           </a:p>
@@ -5075,7 +5080,7 @@
           <a:p>
             <a:fld id="{17B40696-48CB-43CB-8D0C-37FF29617483}" type="datetimeFigureOut">
               <a:rPr lang="en-US" smtClean="0"/>
-              <a:t>7/8/2026</a:t>
+              <a:t>7/13/2026</a:t>
             </a:fld>
             <a:endParaRPr lang="en-US"/>
           </a:p>
@@ -5188,7 +5193,7 @@
           <a:p>
             <a:fld id="{17B40696-48CB-43CB-8D0C-37FF29617483}" type="datetimeFigureOut">
               <a:rPr lang="en-US" smtClean="0"/>
-              <a:t>7/8/2026</a:t>
+              <a:t>7/13/2026</a:t>
             </a:fld>
             <a:endParaRPr lang="en-US"/>
           </a:p>
@@ -5501,7 +5506,7 @@
           <a:p>
             <a:fld id="{17B40696-48CB-43CB-8D0C-37FF29617483}" type="datetimeFigureOut">
               <a:rPr lang="en-US" smtClean="0"/>
-              <a:t>7/8/2026</a:t>
+              <a:t>7/13/2026</a:t>
             </a:fld>
             <a:endParaRPr lang="en-US"/>
           </a:p>
@@ -5790,7 +5795,7 @@
           <a:p>
             <a:fld id="{17B40696-48CB-43CB-8D0C-37FF29617483}" type="datetimeFigureOut">
               <a:rPr lang="en-US" smtClean="0"/>
-              <a:t>7/8/2026</a:t>
+              <a:t>7/13/2026</a:t>
             </a:fld>
             <a:endParaRPr lang="en-US"/>
           </a:p>
@@ -6033,7 +6038,7 @@
           <a:p>
             <a:fld id="{17B40696-48CB-43CB-8D0C-37FF29617483}" type="datetimeFigureOut">
               <a:rPr lang="en-US" smtClean="0"/>
-              <a:t>7/8/2026</a:t>
+              <a:t>7/13/2026</a:t>
             </a:fld>
             <a:endParaRPr lang="en-US"/>
           </a:p>
@@ -7116,7 +7121,7 @@
         </p:blipFill>
         <p:spPr>
           <a:xfrm>
-            <a:off x="25191" y="2211879"/>
+            <a:off x="22169" y="2152927"/>
             <a:ext cx="2905101" cy="2552145"/>
           </a:xfrm>
           <a:prstGeom prst="rect">
@@ -8370,60 +8375,6 @@
       </p:sp>
       <p:sp>
         <p:nvSpPr>
-          <p:cNvPr id="2" name="מלבן 1">
-            <a:extLst>
-              <a:ext uri="{FF2B5EF4-FFF2-40B4-BE49-F238E27FC236}">
-                <a16:creationId xmlns:a16="http://schemas.microsoft.com/office/drawing/2014/main" id="{272864EB-81E8-6476-CE44-437D16058C50}"/>
-              </a:ext>
-            </a:extLst>
-          </p:cNvPr>
-          <p:cNvSpPr>
-            <a:spLocks/>
-          </p:cNvSpPr>
-          <p:nvPr/>
-        </p:nvSpPr>
-        <p:spPr>
-          <a:xfrm>
-            <a:off x="1201479" y="5475767"/>
-            <a:ext cx="9080205" cy="1509824"/>
-          </a:xfrm>
-          <a:prstGeom prst="rect">
-            <a:avLst/>
-          </a:prstGeom>
-          <a:solidFill>
-            <a:srgbClr val="FFFFFF"/>
-          </a:solidFill>
-          <a:ln>
-            <a:noFill/>
-          </a:ln>
-        </p:spPr>
-        <p:style>
-          <a:lnRef idx="2">
-            <a:schemeClr val="accent1">
-              <a:shade val="15000"/>
-            </a:schemeClr>
-          </a:lnRef>
-          <a:fillRef idx="1">
-            <a:schemeClr val="accent1"/>
-          </a:fillRef>
-          <a:effectRef idx="0">
-            <a:schemeClr val="accent1"/>
-          </a:effectRef>
-          <a:fontRef idx="minor">
-            <a:schemeClr val="lt1"/>
-          </a:fontRef>
-        </p:style>
-        <p:txBody>
-          <a:bodyPr rtlCol="0" anchor="ctr"/>
-          <a:lstStyle/>
-          <a:p>
-            <a:pPr algn="ctr"/>
-            <a:endParaRPr lang="en-US"/>
-          </a:p>
-        </p:txBody>
-      </p:sp>
-      <p:sp>
-        <p:nvSpPr>
           <p:cNvPr id="4" name="תיבת טקסט 3">
             <a:extLst>
               <a:ext uri="{FF2B5EF4-FFF2-40B4-BE49-F238E27FC236}">
@@ -8498,6 +8449,62 @@
                 <a:cs typeface="Calibri" panose="020F0502020204030204" pitchFamily="34" charset="0"/>
               </a:rPr>
               <a:t>91.1%</a:t>
+            </a:r>
+          </a:p>
+        </p:txBody>
+      </p:sp>
+      <p:sp>
+        <p:nvSpPr>
+          <p:cNvPr id="3" name="תיבת טקסט 2">
+            <a:extLst>
+              <a:ext uri="{FF2B5EF4-FFF2-40B4-BE49-F238E27FC236}">
+                <a16:creationId xmlns:a16="http://schemas.microsoft.com/office/drawing/2014/main" id="{34597EB0-0A81-8F4E-6A8B-A1019F17CD41}"/>
+              </a:ext>
+            </a:extLst>
+          </p:cNvPr>
+          <p:cNvSpPr txBox="1"/>
+          <p:nvPr/>
+        </p:nvSpPr>
+        <p:spPr>
+          <a:xfrm>
+            <a:off x="2210067" y="5551262"/>
+            <a:ext cx="8291015" cy="923330"/>
+          </a:xfrm>
+          <a:prstGeom prst="rect">
+            <a:avLst/>
+          </a:prstGeom>
+          <a:solidFill>
+            <a:schemeClr val="bg1"/>
+          </a:solidFill>
+          <a:ln>
+            <a:noFill/>
+          </a:ln>
+        </p:spPr>
+        <p:txBody>
+          <a:bodyPr wrap="square" rtlCol="0">
+            <a:spAutoFit/>
+          </a:bodyPr>
+          <a:lstStyle/>
+          <a:p>
+            <a:pPr algn="l" rtl="0"/>
+            <a:r>
+              <a:rPr lang="en-US" b="1" dirty="0">
+                <a:latin typeface="Calibri" panose="020F0502020204030204" pitchFamily="34" charset="0"/>
+                <a:ea typeface="Calibri" panose="020F0502020204030204" pitchFamily="34" charset="0"/>
+                <a:cs typeface="Calibri" panose="020F0502020204030204" pitchFamily="34" charset="0"/>
+              </a:rPr>
+              <a:t>Partial fine-tuning (layer4 only) was used to prevent overfitting.</a:t>
+            </a:r>
+          </a:p>
+          <a:p>
+            <a:pPr algn="l" rtl="0"/>
+            <a:r>
+              <a:rPr lang="en-US" b="1" dirty="0">
+                <a:latin typeface="Calibri" panose="020F0502020204030204" pitchFamily="34" charset="0"/>
+                <a:ea typeface="Calibri" panose="020F0502020204030204" pitchFamily="34" charset="0"/>
+                <a:cs typeface="Calibri" panose="020F0502020204030204" pitchFamily="34" charset="0"/>
+              </a:rPr>
+              <a:t>Due to its larger capacity, ResNet50 adapts more strongly to synthetic data, which may slightly reduce generalization compared to ResNet18.</a:t>
             </a:r>
           </a:p>
         </p:txBody>
